--- a/decks/hist-british-empire-india/hist-british-empire-india_ch2_company-rule.pptx
+++ b/decks/hist-british-empire-india/hist-british-empire-india_ch2_company-rule.pptx
@@ -126,30 +126,30 @@
   <p:extLst>
     <p:ext uri="{521415D9-36F7-43E2-AB2F-B90AF26B5E84}">
       <p14:sectionLst xmlns:p14="http://schemas.microsoft.com/office/powerpoint/2010/main">
-        <p14:section name="Opening" id="{82453fa6-be1b-74f4-0a76-5cc9190086a3}">
+        <p14:section name="Opening" id="{40b47bdd-32f1-a0fb-45a3-5a4b28eb6f35}">
           <p14:sldIdLst>
             <p14:sldId id="256"/>
           </p14:sldIdLst>
         </p14:section>
-        <p14:section name="Gate" id="{d5435523-5166-5bba-0917-465f39147a17}">
+        <p14:section name="Gate" id="{6ce00cbf-fc48-228a-861d-e96bc58165ed}">
           <p14:sldIdLst>
             <p14:sldId id="257"/>
             <p14:sldId id="258"/>
           </p14:sldIdLst>
         </p14:section>
-        <p14:section name="Pre-teach" id="{a44b080a-2cd9-f34b-46ed-c2091c6e058f}">
+        <p14:section name="Pre-teach" id="{1517efe4-197d-458e-edc5-b9c80418f7c0}">
           <p14:sldIdLst>
             <p14:sldId id="259"/>
             <p14:sldId id="260"/>
           </p14:sldIdLst>
         </p14:section>
-        <p14:section name="Read-along" id="{59fccb67-a4d8-76e9-c6c0-3b3fcc7d427b}">
+        <p14:section name="Read-along" id="{fa83db27-4e0d-10a4-1fc0-729d1baaad2b}">
           <p14:sldIdLst>
             <p14:sldId id="261"/>
             <p14:sldId id="262"/>
           </p14:sldIdLst>
         </p14:section>
-        <p14:section name="Teach" id="{c71b276e-177a-c0cb-e165-1757ba9f8c04}">
+        <p14:section name="Teach" id="{ed295646-e011-b00e-cf71-2707d5cfe6d3}">
           <p14:sldIdLst>
             <p14:sldId id="263"/>
             <p14:sldId id="264"/>
@@ -158,7 +158,7 @@
             <p14:sldId id="267"/>
           </p14:sldIdLst>
         </p14:section>
-        <p14:section name="Routes" id="{7e9a2e0d-d0c8-0904-9ae4-f8014f7a3f8e}">
+        <p14:section name="Routes" id="{343fb245-8b14-c025-0dc9-d4e12c051770}">
           <p14:sldIdLst>
             <p14:sldId id="268"/>
             <p14:sldId id="269"/>
@@ -166,12 +166,12 @@
             <p14:sldId id="271"/>
           </p14:sldIdLst>
         </p14:section>
-        <p14:section name="Close" id="{f833034e-1eba-bf93-71a2-5fb5ea85f368}">
+        <p14:section name="Close" id="{d4b6663f-1728-f93f-ab1c-dabd62b7653d}">
           <p14:sldIdLst>
             <p14:sldId id="272"/>
           </p14:sldIdLst>
         </p14:section>
-        <p14:section name="Answers" id="{507d3ac6-bae9-631d-3082-ab4948640bae}">
+        <p14:section name="Answers" id="{3e45395e-6304-94bf-e6bb-fb326671244b}">
           <p14:sldIdLst>
             <p14:sldId id="273"/>
             <p14:sldId id="274"/>
@@ -859,7 +859,7 @@
             <a:r>
               <a:rPr lang="en-US" dirty="0"/>
               <a:t>Teach — Schools, English and ‘British values’: economic or social change?. Say it in your own words, then check understanding with a quick question: ask a pupil from the pre-teach group first, since they met these words and ideas before the lesson. Pupils try to recall before you re-explain.
-In the 1830s the British government gave the Company money to educate the people it had ruled since 1757. The Company employed Thomas Babington Macaulay to set up a British-style education system in India. Lessons were to be in English, and Macaulay focused on bringing what he called British values to India. He wanted to educate the children of wealthy parents, who might one day work for the Company.
+In the 1830s the British government gave the Company money to educate the people it had ruled since 1757. It hired Thomas Babington Macaulay to set up a British-style education system in India. Lessons were to be in English, and Macaulay focused on bringing what he called British values to India. He wanted the children of wealthy families educated, in the hope that they would one day work for the Company.
 Your lesson asked you to weigh this up. A benefit for some Indians was access to schooling and to jobs in the Company's offices. A disadvantage was that the system ignored Indian languages and culture, served the Company's needs rather than India's, and reached only the children of the rich. The schools are a social change: they changed how people learned and how they were treated.
 To decide whether the Company brought more economic or more social change, your lesson gives four tests of how significant a change was: its impact on ordinary people, their health and wealth; its impact on the whole country; its longer-term impact; and its impact on the wider world. De-industrialisation and the famine hit millions of ordinary people across Bengal and lasted for generations. The schools reached a small, wealthy group. Most pupils conclude that the economic changes were bigger, but you must give your own reasons.
 Tip: Social = people and society: schools, religion, culture, how people are treated. Economic = money: trade, taxes, industry, famine.</a:t>
